--- a/docs/pptx/entire/ritu-entire-scatter-cg-epi-sex.pptx
+++ b/docs/pptx/entire/ritu-entire-scatter-cg-epi-sex.pptx
@@ -4760,7 +4760,7 @@
           </p:nvSpPr>
           <p:spPr>
             <a:xfrm>
-              <a:off x="3757867" y="4431417"/>
+              <a:off x="3757871" y="4431416"/>
               <a:ext cx="52362" cy="52362"/>
             </a:xfrm>
             <a:prstGeom prst="ellipse">
@@ -29820,7 +29820,7 @@
           </p:nvSpPr>
           <p:spPr>
             <a:xfrm>
-              <a:off x="7109168" y="3547488"/>
+              <a:off x="7109161" y="3547489"/>
               <a:ext cx="52362" cy="52362"/>
             </a:xfrm>
             <a:prstGeom prst="ellipse">
@@ -36094,7 +36094,7 @@
                     <a:pt x="1766311" y="1145277"/>
                   </a:lnTo>
                   <a:lnTo>
-                    <a:pt x="1926885" y="1108212"/>
+                    <a:pt x="1926885" y="1108213"/>
                   </a:lnTo>
                   <a:lnTo>
                     <a:pt x="2087459" y="1070843"/>
@@ -36377,7 +36377,7 @@
                     <a:pt x="1766311" y="1145277"/>
                   </a:lnTo>
                   <a:lnTo>
-                    <a:pt x="1926885" y="1108212"/>
+                    <a:pt x="1926885" y="1108213"/>
                   </a:lnTo>
                   <a:lnTo>
                     <a:pt x="2087459" y="1070843"/>
@@ -36806,7 +36806,7 @@
                     <a:pt x="0" y="1698705"/>
                   </a:moveTo>
                   <a:lnTo>
-                    <a:pt x="100748" y="1674941"/>
+                    <a:pt x="100748" y="1674942"/>
                   </a:lnTo>
                   <a:lnTo>
                     <a:pt x="201497" y="1651166"/>
@@ -36866,7 +36866,7 @@
                     <a:pt x="2014971" y="1218111"/>
                   </a:lnTo>
                   <a:lnTo>
-                    <a:pt x="2115719" y="1193442"/>
+                    <a:pt x="2115719" y="1193443"/>
                   </a:lnTo>
                   <a:lnTo>
                     <a:pt x="2216468" y="1168653"/>
@@ -36881,7 +36881,7 @@
                     <a:pt x="2518714" y="1093459"/>
                   </a:lnTo>
                   <a:lnTo>
-                    <a:pt x="2619462" y="1068095"/>
+                    <a:pt x="2619462" y="1068096"/>
                   </a:lnTo>
                   <a:lnTo>
                     <a:pt x="2720211" y="1042578"/>
@@ -36920,7 +36920,7 @@
                     <a:pt x="3828445" y="753577"/>
                   </a:lnTo>
                   <a:lnTo>
-                    <a:pt x="3929193" y="726796"/>
+                    <a:pt x="3929193" y="726797"/>
                   </a:lnTo>
                   <a:lnTo>
                     <a:pt x="4029942" y="699967"/>
@@ -36938,7 +36938,7 @@
                     <a:pt x="4432936" y="592270"/>
                   </a:lnTo>
                   <a:lnTo>
-                    <a:pt x="4533685" y="565270"/>
+                    <a:pt x="4533685" y="565271"/>
                   </a:lnTo>
                   <a:lnTo>
                     <a:pt x="4634433" y="538247"/>
@@ -37239,7 +37239,7 @@
                     <a:pt x="0" y="1698705"/>
                   </a:moveTo>
                   <a:lnTo>
-                    <a:pt x="100748" y="1674941"/>
+                    <a:pt x="100748" y="1674942"/>
                   </a:lnTo>
                   <a:lnTo>
                     <a:pt x="201497" y="1651166"/>
@@ -37299,7 +37299,7 @@
                     <a:pt x="2014971" y="1218111"/>
                   </a:lnTo>
                   <a:lnTo>
-                    <a:pt x="2115719" y="1193442"/>
+                    <a:pt x="2115719" y="1193443"/>
                   </a:lnTo>
                   <a:lnTo>
                     <a:pt x="2216468" y="1168653"/>
@@ -37314,7 +37314,7 @@
                     <a:pt x="2518714" y="1093459"/>
                   </a:lnTo>
                   <a:lnTo>
-                    <a:pt x="2619462" y="1068095"/>
+                    <a:pt x="2619462" y="1068096"/>
                   </a:lnTo>
                   <a:lnTo>
                     <a:pt x="2720211" y="1042578"/>
@@ -37353,7 +37353,7 @@
                     <a:pt x="3828445" y="753577"/>
                   </a:lnTo>
                   <a:lnTo>
-                    <a:pt x="3929193" y="726796"/>
+                    <a:pt x="3929193" y="726797"/>
                   </a:lnTo>
                   <a:lnTo>
                     <a:pt x="4029942" y="699967"/>
@@ -37371,7 +37371,7 @@
                     <a:pt x="4432936" y="592270"/>
                   </a:lnTo>
                   <a:lnTo>
-                    <a:pt x="4533685" y="565270"/>
+                    <a:pt x="4533685" y="565271"/>
                   </a:lnTo>
                   <a:lnTo>
                     <a:pt x="4634433" y="538247"/>
@@ -37805,7 +37805,7 @@
                     <a:pt x="3828445" y="707885"/>
                   </a:lnTo>
                   <a:lnTo>
-                    <a:pt x="3929193" y="682442"/>
+                    <a:pt x="3929193" y="682443"/>
                   </a:lnTo>
                   <a:lnTo>
                     <a:pt x="4029942" y="657000"/>
